--- a/Apresentações/01 - Ciência de dados.pptx
+++ b/Apresentações/01 - Ciência de dados.pptx
@@ -21383,6 +21383,9 @@
                     <p:cTn id="3" fill="hold">
                       <p:stCondLst>
                         <p:cond delay="indefinite"/>
+                        <p:cond evt="onBegin" delay="0">
+                          <p:tn val="2"/>
+                        </p:cond>
                       </p:stCondLst>
                       <p:childTnLst>
                         <p:par>
@@ -21392,7 +21395,7 @@
                             </p:stCondLst>
                             <p:childTnLst>
                               <p:par>
-                                <p:cTn id="5" presetID="1" presetClass="entr" presetSubtype="0" fill="hold" grpId="0" nodeType="clickEffect">
+                                <p:cTn id="5" presetID="1" presetClass="entr" presetSubtype="0" fill="hold" grpId="0" nodeType="withEffect">
                                   <p:stCondLst>
                                     <p:cond delay="0"/>
                                   </p:stCondLst>
@@ -22052,6 +22055,9 @@
                     <p:cTn id="3" fill="hold">
                       <p:stCondLst>
                         <p:cond delay="indefinite"/>
+                        <p:cond evt="onBegin" delay="0">
+                          <p:tn val="2"/>
+                        </p:cond>
                       </p:stCondLst>
                       <p:childTnLst>
                         <p:par>
@@ -22061,7 +22067,7 @@
                             </p:stCondLst>
                             <p:childTnLst>
                               <p:par>
-                                <p:cTn id="5" presetID="1" presetClass="entr" presetSubtype="0" fill="hold" grpId="0" nodeType="clickEffect">
+                                <p:cTn id="5" presetID="1" presetClass="entr" presetSubtype="0" fill="hold" grpId="0" nodeType="withEffect">
                                   <p:stCondLst>
                                     <p:cond delay="0"/>
                                   </p:stCondLst>
@@ -22724,6 +22730,9 @@
                     <p:cTn id="3" fill="hold">
                       <p:stCondLst>
                         <p:cond delay="indefinite"/>
+                        <p:cond evt="onBegin" delay="0">
+                          <p:tn val="2"/>
+                        </p:cond>
                       </p:stCondLst>
                       <p:childTnLst>
                         <p:par>
@@ -22733,7 +22742,7 @@
                             </p:stCondLst>
                             <p:childTnLst>
                               <p:par>
-                                <p:cTn id="5" presetID="1" presetClass="entr" presetSubtype="0" fill="hold" grpId="0" nodeType="clickEffect">
+                                <p:cTn id="5" presetID="1" presetClass="entr" presetSubtype="0" fill="hold" grpId="0" nodeType="withEffect">
                                   <p:stCondLst>
                                     <p:cond delay="0"/>
                                   </p:stCondLst>
@@ -23310,6 +23319,9 @@
                     <p:cTn id="3" fill="hold">
                       <p:stCondLst>
                         <p:cond delay="indefinite"/>
+                        <p:cond evt="onBegin" delay="0">
+                          <p:tn val="2"/>
+                        </p:cond>
                       </p:stCondLst>
                       <p:childTnLst>
                         <p:par>
@@ -23319,7 +23331,7 @@
                             </p:stCondLst>
                             <p:childTnLst>
                               <p:par>
-                                <p:cTn id="5" presetID="1" presetClass="entr" presetSubtype="0" fill="hold" grpId="0" nodeType="clickEffect">
+                                <p:cTn id="5" presetID="1" presetClass="entr" presetSubtype="0" fill="hold" grpId="0" nodeType="withEffect">
                                   <p:stCondLst>
                                     <p:cond delay="0"/>
                                   </p:stCondLst>
@@ -23912,6 +23924,9 @@
                     <p:cTn id="3" fill="hold">
                       <p:stCondLst>
                         <p:cond delay="indefinite"/>
+                        <p:cond evt="onBegin" delay="0">
+                          <p:tn val="2"/>
+                        </p:cond>
                       </p:stCondLst>
                       <p:childTnLst>
                         <p:par>
@@ -23921,7 +23936,7 @@
                             </p:stCondLst>
                             <p:childTnLst>
                               <p:par>
-                                <p:cTn id="5" presetID="1" presetClass="entr" presetSubtype="0" fill="hold" grpId="0" nodeType="clickEffect">
+                                <p:cTn id="5" presetID="1" presetClass="entr" presetSubtype="0" fill="hold" grpId="0" nodeType="withEffect">
                                   <p:stCondLst>
                                     <p:cond delay="0"/>
                                   </p:stCondLst>
@@ -24520,6 +24535,9 @@
                     <p:cTn id="3" fill="hold">
                       <p:stCondLst>
                         <p:cond delay="indefinite"/>
+                        <p:cond evt="onBegin" delay="0">
+                          <p:tn val="2"/>
+                        </p:cond>
                       </p:stCondLst>
                       <p:childTnLst>
                         <p:par>
@@ -24529,7 +24547,7 @@
                             </p:stCondLst>
                             <p:childTnLst>
                               <p:par>
-                                <p:cTn id="5" presetID="1" presetClass="entr" presetSubtype="0" fill="hold" grpId="0" nodeType="clickEffect">
+                                <p:cTn id="5" presetID="1" presetClass="entr" presetSubtype="0" fill="hold" grpId="0" nodeType="withEffect">
                                   <p:stCondLst>
                                     <p:cond delay="0"/>
                                   </p:stCondLst>
@@ -25099,6 +25117,9 @@
                     <p:cTn id="3" fill="hold">
                       <p:stCondLst>
                         <p:cond delay="indefinite"/>
+                        <p:cond evt="onBegin" delay="0">
+                          <p:tn val="2"/>
+                        </p:cond>
                       </p:stCondLst>
                       <p:childTnLst>
                         <p:par>
@@ -25108,7 +25129,7 @@
                             </p:stCondLst>
                             <p:childTnLst>
                               <p:par>
-                                <p:cTn id="5" presetID="1" presetClass="entr" presetSubtype="0" fill="hold" grpId="0" nodeType="clickEffect">
+                                <p:cTn id="5" presetID="1" presetClass="entr" presetSubtype="0" fill="hold" grpId="0" nodeType="withEffect">
                                   <p:stCondLst>
                                     <p:cond delay="0"/>
                                   </p:stCondLst>
@@ -25682,6 +25703,9 @@
                     <p:cTn id="3" fill="hold">
                       <p:stCondLst>
                         <p:cond delay="indefinite"/>
+                        <p:cond evt="onBegin" delay="0">
+                          <p:tn val="2"/>
+                        </p:cond>
                       </p:stCondLst>
                       <p:childTnLst>
                         <p:par>
@@ -25691,7 +25715,7 @@
                             </p:stCondLst>
                             <p:childTnLst>
                               <p:par>
-                                <p:cTn id="5" presetID="1" presetClass="entr" presetSubtype="0" fill="hold" grpId="0" nodeType="clickEffect">
+                                <p:cTn id="5" presetID="1" presetClass="entr" presetSubtype="0" fill="hold" grpId="0" nodeType="withEffect">
                                   <p:stCondLst>
                                     <p:cond delay="0"/>
                                   </p:stCondLst>
@@ -26262,6 +26286,9 @@
                     <p:cTn id="3" fill="hold">
                       <p:stCondLst>
                         <p:cond delay="indefinite"/>
+                        <p:cond evt="onBegin" delay="0">
+                          <p:tn val="2"/>
+                        </p:cond>
                       </p:stCondLst>
                       <p:childTnLst>
                         <p:par>
@@ -26271,7 +26298,7 @@
                             </p:stCondLst>
                             <p:childTnLst>
                               <p:par>
-                                <p:cTn id="5" presetID="1" presetClass="entr" presetSubtype="0" fill="hold" grpId="0" nodeType="clickEffect">
+                                <p:cTn id="5" presetID="1" presetClass="entr" presetSubtype="0" fill="hold" grpId="0" nodeType="withEffect">
                                   <p:stCondLst>
                                     <p:cond delay="0"/>
                                   </p:stCondLst>
@@ -26855,6 +26882,9 @@
                     <p:cTn id="3" fill="hold">
                       <p:stCondLst>
                         <p:cond delay="indefinite"/>
+                        <p:cond evt="onBegin" delay="0">
+                          <p:tn val="2"/>
+                        </p:cond>
                       </p:stCondLst>
                       <p:childTnLst>
                         <p:par>
@@ -26864,7 +26894,7 @@
                             </p:stCondLst>
                             <p:childTnLst>
                               <p:par>
-                                <p:cTn id="5" presetID="1" presetClass="entr" presetSubtype="0" fill="hold" grpId="0" nodeType="clickEffect">
+                                <p:cTn id="5" presetID="1" presetClass="entr" presetSubtype="0" fill="hold" grpId="0" nodeType="withEffect">
                                   <p:stCondLst>
                                     <p:cond delay="0"/>
                                   </p:stCondLst>
@@ -27396,6 +27426,9 @@
                     <p:cTn id="3" fill="hold">
                       <p:stCondLst>
                         <p:cond delay="indefinite"/>
+                        <p:cond evt="onBegin" delay="0">
+                          <p:tn val="2"/>
+                        </p:cond>
                       </p:stCondLst>
                       <p:childTnLst>
                         <p:par>
@@ -27405,7 +27438,7 @@
                             </p:stCondLst>
                             <p:childTnLst>
                               <p:par>
-                                <p:cTn id="5" presetID="1" presetClass="entr" presetSubtype="0" fill="hold" grpId="0" nodeType="clickEffect">
+                                <p:cTn id="5" presetID="1" presetClass="entr" presetSubtype="0" fill="hold" grpId="0" nodeType="withEffect">
                                   <p:stCondLst>
                                     <p:cond delay="0"/>
                                   </p:stCondLst>
@@ -27937,6 +27970,9 @@
                     <p:cTn id="3" fill="hold">
                       <p:stCondLst>
                         <p:cond delay="indefinite"/>
+                        <p:cond evt="onBegin" delay="0">
+                          <p:tn val="2"/>
+                        </p:cond>
                       </p:stCondLst>
                       <p:childTnLst>
                         <p:par>
@@ -27946,7 +27982,7 @@
                             </p:stCondLst>
                             <p:childTnLst>
                               <p:par>
-                                <p:cTn id="5" presetID="1" presetClass="entr" presetSubtype="0" fill="hold" grpId="0" nodeType="clickEffect">
+                                <p:cTn id="5" presetID="1" presetClass="entr" presetSubtype="0" fill="hold" grpId="0" nodeType="withEffect">
                                   <p:stCondLst>
                                     <p:cond delay="0"/>
                                   </p:stCondLst>
@@ -28517,6 +28553,9 @@
                     <p:cTn id="3" fill="hold">
                       <p:stCondLst>
                         <p:cond delay="indefinite"/>
+                        <p:cond evt="onBegin" delay="0">
+                          <p:tn val="2"/>
+                        </p:cond>
                       </p:stCondLst>
                       <p:childTnLst>
                         <p:par>
@@ -28526,7 +28565,7 @@
                             </p:stCondLst>
                             <p:childTnLst>
                               <p:par>
-                                <p:cTn id="5" presetID="1" presetClass="entr" presetSubtype="0" fill="hold" grpId="0" nodeType="clickEffect">
+                                <p:cTn id="5" presetID="1" presetClass="entr" presetSubtype="0" fill="hold" grpId="0" nodeType="withEffect">
                                   <p:stCondLst>
                                     <p:cond delay="0"/>
                                   </p:stCondLst>
@@ -29168,6 +29207,9 @@
                     <p:cTn id="3" fill="hold">
                       <p:stCondLst>
                         <p:cond delay="indefinite"/>
+                        <p:cond evt="onBegin" delay="0">
+                          <p:tn val="2"/>
+                        </p:cond>
                       </p:stCondLst>
                       <p:childTnLst>
                         <p:par>
@@ -29177,7 +29219,7 @@
                             </p:stCondLst>
                             <p:childTnLst>
                               <p:par>
-                                <p:cTn id="5" presetID="1" presetClass="entr" presetSubtype="0" fill="hold" grpId="0" nodeType="clickEffect">
+                                <p:cTn id="5" presetID="1" presetClass="entr" presetSubtype="0" fill="hold" grpId="0" nodeType="withEffect">
                                   <p:stCondLst>
                                     <p:cond delay="0"/>
                                   </p:stCondLst>
@@ -29728,6 +29770,9 @@
                     <p:cTn id="3" fill="hold">
                       <p:stCondLst>
                         <p:cond delay="indefinite"/>
+                        <p:cond evt="onBegin" delay="0">
+                          <p:tn val="2"/>
+                        </p:cond>
                       </p:stCondLst>
                       <p:childTnLst>
                         <p:par>
@@ -29737,7 +29782,7 @@
                             </p:stCondLst>
                             <p:childTnLst>
                               <p:par>
-                                <p:cTn id="5" presetID="1" presetClass="entr" presetSubtype="0" fill="hold" grpId="0" nodeType="clickEffect">
+                                <p:cTn id="5" presetID="1" presetClass="entr" presetSubtype="0" fill="hold" grpId="0" nodeType="withEffect">
                                   <p:stCondLst>
                                     <p:cond delay="0"/>
                                   </p:stCondLst>
@@ -30324,6 +30369,9 @@
                     <p:cTn id="3" fill="hold">
                       <p:stCondLst>
                         <p:cond delay="indefinite"/>
+                        <p:cond evt="onBegin" delay="0">
+                          <p:tn val="2"/>
+                        </p:cond>
                       </p:stCondLst>
                       <p:childTnLst>
                         <p:par>
@@ -30333,7 +30381,7 @@
                             </p:stCondLst>
                             <p:childTnLst>
                               <p:par>
-                                <p:cTn id="5" presetID="1" presetClass="entr" presetSubtype="0" fill="hold" grpId="0" nodeType="clickEffect">
+                                <p:cTn id="5" presetID="1" presetClass="entr" presetSubtype="0" fill="hold" grpId="0" nodeType="withEffect">
                                   <p:stCondLst>
                                     <p:cond delay="0"/>
                                   </p:stCondLst>
@@ -30920,6 +30968,9 @@
                     <p:cTn id="3" fill="hold">
                       <p:stCondLst>
                         <p:cond delay="indefinite"/>
+                        <p:cond evt="onBegin" delay="0">
+                          <p:tn val="2"/>
+                        </p:cond>
                       </p:stCondLst>
                       <p:childTnLst>
                         <p:par>
@@ -30929,7 +30980,7 @@
                             </p:stCondLst>
                             <p:childTnLst>
                               <p:par>
-                                <p:cTn id="5" presetID="1" presetClass="entr" presetSubtype="0" fill="hold" grpId="0" nodeType="clickEffect">
+                                <p:cTn id="5" presetID="1" presetClass="entr" presetSubtype="0" fill="hold" grpId="0" nodeType="withEffect">
                                   <p:stCondLst>
                                     <p:cond delay="0"/>
                                   </p:stCondLst>
@@ -31483,6 +31534,9 @@
                     <p:cTn id="3" fill="hold">
                       <p:stCondLst>
                         <p:cond delay="indefinite"/>
+                        <p:cond evt="onBegin" delay="0">
+                          <p:tn val="2"/>
+                        </p:cond>
                       </p:stCondLst>
                       <p:childTnLst>
                         <p:par>
@@ -31492,7 +31546,7 @@
                             </p:stCondLst>
                             <p:childTnLst>
                               <p:par>
-                                <p:cTn id="5" presetID="1" presetClass="entr" presetSubtype="0" fill="hold" grpId="0" nodeType="clickEffect">
+                                <p:cTn id="5" presetID="1" presetClass="entr" presetSubtype="0" fill="hold" grpId="0" nodeType="withEffect">
                                   <p:stCondLst>
                                     <p:cond delay="0"/>
                                   </p:stCondLst>
